--- a/PPTs/08_Experiment_08_React_Router_and_Updating_the_Screen.pptx
+++ b/PPTs/08_Experiment_08_React_Router_and_Updating_the_Screen.pptx
@@ -3467,7 +3467,7 @@
         <p:spPr>
           <a:xfrm>
             <a:off x="1115568" y="1408176"/>
-            <a:ext cx="10241280" cy="384048"/>
+            <a:ext cx="10241280" cy="640080"/>
           </a:xfrm>
           <a:prstGeom prst="rect">
             <a:avLst/>
@@ -3489,7 +3489,11 @@
               </a:defRPr>
             </a:pPr>
             <a:r>
-              <a:t>Navigate between Home, About and Counter screens.</a:t>
+              <a:t>Router program: Home / Students / About navigation, student detail pages</a:t>
+            </a:r>
+            <a:br/>
+            <a:r>
+              <a:t>and 404 page.</a:t>
             </a:r>
           </a:p>
         </p:txBody>
@@ -3502,7 +3506,7 @@
         </p:nvSpPr>
         <p:spPr>
           <a:xfrm>
-            <a:off x="777240" y="2057400"/>
+            <a:off x="777240" y="2221991"/>
             <a:ext cx="292608" cy="365760"/>
           </a:xfrm>
           <a:prstGeom prst="rect">
@@ -3538,7 +3542,7 @@
         </p:nvSpPr>
         <p:spPr>
           <a:xfrm>
-            <a:off x="1115568" y="2048256"/>
+            <a:off x="1115568" y="2212848"/>
             <a:ext cx="10241280" cy="384048"/>
           </a:xfrm>
           <a:prstGeom prst="rect">
@@ -3561,151 +3565,7 @@
               </a:defRPr>
             </a:pPr>
             <a:r>
-              <a:t>Use React Router links without a full page reload.</a:t>
-            </a:r>
-          </a:p>
-        </p:txBody>
-      </p:sp>
-      <p:sp>
-        <p:nvSpPr>
-          <p:cNvPr id="9" name="TextBox 8"/>
-          <p:cNvSpPr txBox="1"/>
-          <p:nvPr/>
-        </p:nvSpPr>
-        <p:spPr>
-          <a:xfrm>
-            <a:off x="777240" y="2697480"/>
-            <a:ext cx="292608" cy="365760"/>
-          </a:xfrm>
-          <a:prstGeom prst="rect">
-            <a:avLst/>
-          </a:prstGeom>
-          <a:noFill/>
-        </p:spPr>
-        <p:txBody>
-          <a:bodyPr wrap="square" lIns="45720" rIns="45720" tIns="27432" bIns="27432" anchor="t">
-            <a:spAutoFit/>
-          </a:bodyPr>
-          <a:lstStyle/>
-          <a:p>
-            <a:pPr algn="l">
-              <a:defRPr sz="2200" b="1">
-                <a:solidFill>
-                  <a:srgbClr val="305D9C"/>
-                </a:solidFill>
-                <a:latin typeface="Aptos"/>
-              </a:defRPr>
-            </a:pPr>
-            <a:r>
-              <a:t>•</a:t>
-            </a:r>
-          </a:p>
-        </p:txBody>
-      </p:sp>
-      <p:sp>
-        <p:nvSpPr>
-          <p:cNvPr id="10" name="TextBox 9"/>
-          <p:cNvSpPr txBox="1"/>
-          <p:nvPr/>
-        </p:nvSpPr>
-        <p:spPr>
-          <a:xfrm>
-            <a:off x="1115568" y="2688336"/>
-            <a:ext cx="10241280" cy="384048"/>
-          </a:xfrm>
-          <a:prstGeom prst="rect">
-            <a:avLst/>
-          </a:prstGeom>
-          <a:noFill/>
-        </p:spPr>
-        <p:txBody>
-          <a:bodyPr wrap="square" lIns="45720" rIns="45720" tIns="27432" bIns="27432" anchor="t">
-            <a:spAutoFit/>
-          </a:bodyPr>
-          <a:lstStyle/>
-          <a:p>
-            <a:pPr algn="l">
-              <a:defRPr sz="1800" b="0">
-                <a:solidFill>
-                  <a:srgbClr val="23272F"/>
-                </a:solidFill>
-                <a:latin typeface="Aptos"/>
-              </a:defRPr>
-            </a:pPr>
-            <a:r>
-              <a:t>Store counter state using useState().</a:t>
-            </a:r>
-          </a:p>
-        </p:txBody>
-      </p:sp>
-      <p:sp>
-        <p:nvSpPr>
-          <p:cNvPr id="11" name="TextBox 10"/>
-          <p:cNvSpPr txBox="1"/>
-          <p:nvPr/>
-        </p:nvSpPr>
-        <p:spPr>
-          <a:xfrm>
-            <a:off x="777240" y="3337560"/>
-            <a:ext cx="292608" cy="365760"/>
-          </a:xfrm>
-          <a:prstGeom prst="rect">
-            <a:avLst/>
-          </a:prstGeom>
-          <a:noFill/>
-        </p:spPr>
-        <p:txBody>
-          <a:bodyPr wrap="square" lIns="45720" rIns="45720" tIns="27432" bIns="27432" anchor="t">
-            <a:spAutoFit/>
-          </a:bodyPr>
-          <a:lstStyle/>
-          <a:p>
-            <a:pPr algn="l">
-              <a:defRPr sz="2200" b="1">
-                <a:solidFill>
-                  <a:srgbClr val="305D9C"/>
-                </a:solidFill>
-                <a:latin typeface="Aptos"/>
-              </a:defRPr>
-            </a:pPr>
-            <a:r>
-              <a:t>•</a:t>
-            </a:r>
-          </a:p>
-        </p:txBody>
-      </p:sp>
-      <p:sp>
-        <p:nvSpPr>
-          <p:cNvPr id="12" name="TextBox 11"/>
-          <p:cNvSpPr txBox="1"/>
-          <p:nvPr/>
-        </p:nvSpPr>
-        <p:spPr>
-          <a:xfrm>
-            <a:off x="1115568" y="3328416"/>
-            <a:ext cx="10241280" cy="384048"/>
-          </a:xfrm>
-          <a:prstGeom prst="rect">
-            <a:avLst/>
-          </a:prstGeom>
-          <a:noFill/>
-        </p:spPr>
-        <p:txBody>
-          <a:bodyPr wrap="square" lIns="45720" rIns="45720" tIns="27432" bIns="27432" anchor="t">
-            <a:spAutoFit/>
-          </a:bodyPr>
-          <a:lstStyle/>
-          <a:p>
-            <a:pPr algn="l">
-              <a:defRPr sz="1800" b="0">
-                <a:solidFill>
-                  <a:srgbClr val="23272F"/>
-                </a:solidFill>
-                <a:latin typeface="Aptos"/>
-              </a:defRPr>
-            </a:pPr>
-            <a:r>
-              <a:t>Re-render the screen when state changes.</a:t>
+              <a:t>Screen update program: counter plus a live clock.</a:t>
             </a:r>
           </a:p>
         </p:txBody>
